--- a/public/videos/repositories/furusato-hikaku/furusato-hikaku-tech-preview.pptx
+++ b/public/videos/repositories/furusato-hikaku/furusato-hikaku-tech-preview.pptx
@@ -134,7 +134,7 @@
           <p:cNvPr id="2" name="タイトル 1">
             <a:extLst>
               <a:ext uri="{FF2B5EF4-FFF2-40B4-BE49-F238E27FC236}">
-                <a16:creationId xmlns:a16="http://schemas.microsoft.com/office/drawing/2014/main" id="{9DED536D-0F28-82D0-2DF9-003B67A93013}"/>
+                <a16:creationId xmlns:a16="http://schemas.microsoft.com/office/drawing/2014/main" id="{56EE9F8C-1D20-0B4C-90A8-47706D831EAF}"/>
               </a:ext>
             </a:extLst>
           </p:cNvPr>
@@ -171,7 +171,7 @@
           <p:cNvPr id="3" name="字幕 2">
             <a:extLst>
               <a:ext uri="{FF2B5EF4-FFF2-40B4-BE49-F238E27FC236}">
-                <a16:creationId xmlns:a16="http://schemas.microsoft.com/office/drawing/2014/main" id="{C76DC188-DB4E-675E-5679-48FCBD08558F}"/>
+                <a16:creationId xmlns:a16="http://schemas.microsoft.com/office/drawing/2014/main" id="{915A88D7-9242-6346-B15F-CBB4B521EA98}"/>
               </a:ext>
             </a:extLst>
           </p:cNvPr>
@@ -241,7 +241,7 @@
           <p:cNvPr id="4" name="日付プレースホルダー 3">
             <a:extLst>
               <a:ext uri="{FF2B5EF4-FFF2-40B4-BE49-F238E27FC236}">
-                <a16:creationId xmlns:a16="http://schemas.microsoft.com/office/drawing/2014/main" id="{DBFD6AA8-30AC-C754-0DCE-BD148DCC25CC}"/>
+                <a16:creationId xmlns:a16="http://schemas.microsoft.com/office/drawing/2014/main" id="{6AEAB82F-BD5E-177D-2417-8175925E138C}"/>
               </a:ext>
             </a:extLst>
           </p:cNvPr>
@@ -257,7 +257,7 @@
           <a:bodyPr/>
           <a:lstStyle/>
           <a:p>
-            <a:fld id="{845DA428-B679-420C-BAA7-14273AB10FAE}" type="datetimeFigureOut">
+            <a:fld id="{90CCB8DC-15BF-495C-B498-E4EF98C118AF}" type="datetimeFigureOut">
               <a:rPr kumimoji="1" lang="ja-JP" altLang="en-US" smtClean="0"/>
               <a:t>2026/7/30</a:t>
             </a:fld>
@@ -270,7 +270,7 @@
           <p:cNvPr id="5" name="フッター プレースホルダー 4">
             <a:extLst>
               <a:ext uri="{FF2B5EF4-FFF2-40B4-BE49-F238E27FC236}">
-                <a16:creationId xmlns:a16="http://schemas.microsoft.com/office/drawing/2014/main" id="{7B10089A-80C3-E6C6-983B-15D97FD13F3E}"/>
+                <a16:creationId xmlns:a16="http://schemas.microsoft.com/office/drawing/2014/main" id="{0ABB0452-0F73-BB3D-AA90-7E426FE06CE3}"/>
               </a:ext>
             </a:extLst>
           </p:cNvPr>
@@ -295,7 +295,7 @@
           <p:cNvPr id="6" name="スライド番号プレースホルダー 5">
             <a:extLst>
               <a:ext uri="{FF2B5EF4-FFF2-40B4-BE49-F238E27FC236}">
-                <a16:creationId xmlns:a16="http://schemas.microsoft.com/office/drawing/2014/main" id="{4EF23CC5-DCAB-71BD-4A62-BA5BB4DC9DB1}"/>
+                <a16:creationId xmlns:a16="http://schemas.microsoft.com/office/drawing/2014/main" id="{649DFADC-BDF9-BD40-3C3D-153965F0DF83}"/>
               </a:ext>
             </a:extLst>
           </p:cNvPr>
@@ -311,7 +311,7 @@
           <a:bodyPr/>
           <a:lstStyle/>
           <a:p>
-            <a:fld id="{B9BAF22F-96E6-4AC4-91BF-FD57DBCF7BAB}" type="slidenum">
+            <a:fld id="{D349D00E-E6F1-4FD4-8C4A-E84958D0B49C}" type="slidenum">
               <a:rPr kumimoji="1" lang="ja-JP" altLang="en-US" smtClean="0"/>
               <a:t>‹#›</a:t>
             </a:fld>
@@ -322,7 +322,7 @@
     </p:spTree>
     <p:extLst>
       <p:ext uri="{BB962C8B-B14F-4D97-AF65-F5344CB8AC3E}">
-        <p14:creationId xmlns:p14="http://schemas.microsoft.com/office/powerpoint/2010/main" val="2789215511"/>
+        <p14:creationId xmlns:p14="http://schemas.microsoft.com/office/powerpoint/2010/main" val="1328395136"/>
       </p:ext>
     </p:extLst>
   </p:cSld>
@@ -354,7 +354,7 @@
           <p:cNvPr id="2" name="タイトル 1">
             <a:extLst>
               <a:ext uri="{FF2B5EF4-FFF2-40B4-BE49-F238E27FC236}">
-                <a16:creationId xmlns:a16="http://schemas.microsoft.com/office/drawing/2014/main" id="{FEB6A8EA-9943-D40B-BD6C-8F51BA7BA2B3}"/>
+                <a16:creationId xmlns:a16="http://schemas.microsoft.com/office/drawing/2014/main" id="{B1DB7A40-8771-E534-F08A-EB387CECE62D}"/>
               </a:ext>
             </a:extLst>
           </p:cNvPr>
@@ -382,7 +382,7 @@
           <p:cNvPr id="3" name="縦書きテキスト プレースホルダー 2">
             <a:extLst>
               <a:ext uri="{FF2B5EF4-FFF2-40B4-BE49-F238E27FC236}">
-                <a16:creationId xmlns:a16="http://schemas.microsoft.com/office/drawing/2014/main" id="{5A003154-FD2E-760A-D0E5-D0BD5EA1BEA0}"/>
+                <a16:creationId xmlns:a16="http://schemas.microsoft.com/office/drawing/2014/main" id="{3D4AEB11-1A3C-0BF9-2BAA-547BDDE8FF92}"/>
               </a:ext>
             </a:extLst>
           </p:cNvPr>
@@ -471,7 +471,7 @@
           <p:cNvPr id="4" name="日付プレースホルダー 3">
             <a:extLst>
               <a:ext uri="{FF2B5EF4-FFF2-40B4-BE49-F238E27FC236}">
-                <a16:creationId xmlns:a16="http://schemas.microsoft.com/office/drawing/2014/main" id="{71ED6260-14DD-50D3-6516-7D04AF51A51D}"/>
+                <a16:creationId xmlns:a16="http://schemas.microsoft.com/office/drawing/2014/main" id="{30CF3354-DDC2-8C21-355E-7F67043DCA34}"/>
               </a:ext>
             </a:extLst>
           </p:cNvPr>
@@ -487,7 +487,7 @@
           <a:bodyPr/>
           <a:lstStyle/>
           <a:p>
-            <a:fld id="{845DA428-B679-420C-BAA7-14273AB10FAE}" type="datetimeFigureOut">
+            <a:fld id="{90CCB8DC-15BF-495C-B498-E4EF98C118AF}" type="datetimeFigureOut">
               <a:rPr kumimoji="1" lang="ja-JP" altLang="en-US" smtClean="0"/>
               <a:t>2026/7/30</a:t>
             </a:fld>
@@ -500,7 +500,7 @@
           <p:cNvPr id="5" name="フッター プレースホルダー 4">
             <a:extLst>
               <a:ext uri="{FF2B5EF4-FFF2-40B4-BE49-F238E27FC236}">
-                <a16:creationId xmlns:a16="http://schemas.microsoft.com/office/drawing/2014/main" id="{0A4888D0-3423-9951-CA6D-EABCAA3DF197}"/>
+                <a16:creationId xmlns:a16="http://schemas.microsoft.com/office/drawing/2014/main" id="{3E83949D-8F5E-13E3-71F1-D8B138B7617A}"/>
               </a:ext>
             </a:extLst>
           </p:cNvPr>
@@ -525,7 +525,7 @@
           <p:cNvPr id="6" name="スライド番号プレースホルダー 5">
             <a:extLst>
               <a:ext uri="{FF2B5EF4-FFF2-40B4-BE49-F238E27FC236}">
-                <a16:creationId xmlns:a16="http://schemas.microsoft.com/office/drawing/2014/main" id="{E06E046D-98FF-FFD8-BBB5-A499DB57E83E}"/>
+                <a16:creationId xmlns:a16="http://schemas.microsoft.com/office/drawing/2014/main" id="{18E48757-16A5-8DC2-AADD-1076D4E7B39D}"/>
               </a:ext>
             </a:extLst>
           </p:cNvPr>
@@ -541,7 +541,7 @@
           <a:bodyPr/>
           <a:lstStyle/>
           <a:p>
-            <a:fld id="{B9BAF22F-96E6-4AC4-91BF-FD57DBCF7BAB}" type="slidenum">
+            <a:fld id="{D349D00E-E6F1-4FD4-8C4A-E84958D0B49C}" type="slidenum">
               <a:rPr kumimoji="1" lang="ja-JP" altLang="en-US" smtClean="0"/>
               <a:t>‹#›</a:t>
             </a:fld>
@@ -552,7 +552,7 @@
     </p:spTree>
     <p:extLst>
       <p:ext uri="{BB962C8B-B14F-4D97-AF65-F5344CB8AC3E}">
-        <p14:creationId xmlns:p14="http://schemas.microsoft.com/office/powerpoint/2010/main" val="2595759981"/>
+        <p14:creationId xmlns:p14="http://schemas.microsoft.com/office/powerpoint/2010/main" val="4001421383"/>
       </p:ext>
     </p:extLst>
   </p:cSld>
@@ -584,7 +584,7 @@
           <p:cNvPr id="2" name="縦書きタイトル 1">
             <a:extLst>
               <a:ext uri="{FF2B5EF4-FFF2-40B4-BE49-F238E27FC236}">
-                <a16:creationId xmlns:a16="http://schemas.microsoft.com/office/drawing/2014/main" id="{67D5561E-603C-0C93-D3AE-A750766A10FF}"/>
+                <a16:creationId xmlns:a16="http://schemas.microsoft.com/office/drawing/2014/main" id="{92ED8A79-6FBD-6CDF-4530-C5754E0C7304}"/>
               </a:ext>
             </a:extLst>
           </p:cNvPr>
@@ -617,7 +617,7 @@
           <p:cNvPr id="3" name="縦書きテキスト プレースホルダー 2">
             <a:extLst>
               <a:ext uri="{FF2B5EF4-FFF2-40B4-BE49-F238E27FC236}">
-                <a16:creationId xmlns:a16="http://schemas.microsoft.com/office/drawing/2014/main" id="{39C49C5B-E63D-50A3-3616-A2007DE21D5D}"/>
+                <a16:creationId xmlns:a16="http://schemas.microsoft.com/office/drawing/2014/main" id="{7AFCA43C-5414-CFD6-35A2-085AE790673D}"/>
               </a:ext>
             </a:extLst>
           </p:cNvPr>
@@ -711,7 +711,7 @@
           <p:cNvPr id="4" name="日付プレースホルダー 3">
             <a:extLst>
               <a:ext uri="{FF2B5EF4-FFF2-40B4-BE49-F238E27FC236}">
-                <a16:creationId xmlns:a16="http://schemas.microsoft.com/office/drawing/2014/main" id="{EB1F74D1-84A4-95CC-8F59-401FD7CEB7E2}"/>
+                <a16:creationId xmlns:a16="http://schemas.microsoft.com/office/drawing/2014/main" id="{D8DE312C-28DF-D51B-6684-F33E3001CC75}"/>
               </a:ext>
             </a:extLst>
           </p:cNvPr>
@@ -727,7 +727,7 @@
           <a:bodyPr/>
           <a:lstStyle/>
           <a:p>
-            <a:fld id="{845DA428-B679-420C-BAA7-14273AB10FAE}" type="datetimeFigureOut">
+            <a:fld id="{90CCB8DC-15BF-495C-B498-E4EF98C118AF}" type="datetimeFigureOut">
               <a:rPr kumimoji="1" lang="ja-JP" altLang="en-US" smtClean="0"/>
               <a:t>2026/7/30</a:t>
             </a:fld>
@@ -740,7 +740,7 @@
           <p:cNvPr id="5" name="フッター プレースホルダー 4">
             <a:extLst>
               <a:ext uri="{FF2B5EF4-FFF2-40B4-BE49-F238E27FC236}">
-                <a16:creationId xmlns:a16="http://schemas.microsoft.com/office/drawing/2014/main" id="{B3E49060-055D-C7EF-E577-43808D141F05}"/>
+                <a16:creationId xmlns:a16="http://schemas.microsoft.com/office/drawing/2014/main" id="{6BC5A8B6-2BA8-DBD3-A86A-4F2FB6D48B93}"/>
               </a:ext>
             </a:extLst>
           </p:cNvPr>
@@ -765,7 +765,7 @@
           <p:cNvPr id="6" name="スライド番号プレースホルダー 5">
             <a:extLst>
               <a:ext uri="{FF2B5EF4-FFF2-40B4-BE49-F238E27FC236}">
-                <a16:creationId xmlns:a16="http://schemas.microsoft.com/office/drawing/2014/main" id="{88F54370-125D-9E89-E764-2510EF2395D8}"/>
+                <a16:creationId xmlns:a16="http://schemas.microsoft.com/office/drawing/2014/main" id="{BA0BC424-6583-9B91-8A28-5C264AFF0699}"/>
               </a:ext>
             </a:extLst>
           </p:cNvPr>
@@ -781,7 +781,7 @@
           <a:bodyPr/>
           <a:lstStyle/>
           <a:p>
-            <a:fld id="{B9BAF22F-96E6-4AC4-91BF-FD57DBCF7BAB}" type="slidenum">
+            <a:fld id="{D349D00E-E6F1-4FD4-8C4A-E84958D0B49C}" type="slidenum">
               <a:rPr kumimoji="1" lang="ja-JP" altLang="en-US" smtClean="0"/>
               <a:t>‹#›</a:t>
             </a:fld>
@@ -792,7 +792,7 @@
     </p:spTree>
     <p:extLst>
       <p:ext uri="{BB962C8B-B14F-4D97-AF65-F5344CB8AC3E}">
-        <p14:creationId xmlns:p14="http://schemas.microsoft.com/office/powerpoint/2010/main" val="1283893994"/>
+        <p14:creationId xmlns:p14="http://schemas.microsoft.com/office/powerpoint/2010/main" val="3082937543"/>
       </p:ext>
     </p:extLst>
   </p:cSld>
@@ -824,7 +824,7 @@
           <p:cNvPr id="2" name="タイトル 1">
             <a:extLst>
               <a:ext uri="{FF2B5EF4-FFF2-40B4-BE49-F238E27FC236}">
-                <a16:creationId xmlns:a16="http://schemas.microsoft.com/office/drawing/2014/main" id="{E813AFB2-534F-16EB-E1F1-C4DE02067755}"/>
+                <a16:creationId xmlns:a16="http://schemas.microsoft.com/office/drawing/2014/main" id="{006ED2E5-2CE6-1C1F-D01D-82F035AE891A}"/>
               </a:ext>
             </a:extLst>
           </p:cNvPr>
@@ -852,7 +852,7 @@
           <p:cNvPr id="3" name="コンテンツ プレースホルダー 2">
             <a:extLst>
               <a:ext uri="{FF2B5EF4-FFF2-40B4-BE49-F238E27FC236}">
-                <a16:creationId xmlns:a16="http://schemas.microsoft.com/office/drawing/2014/main" id="{8E9236C6-BF0C-1EBB-AA54-CBCE438CFEA1}"/>
+                <a16:creationId xmlns:a16="http://schemas.microsoft.com/office/drawing/2014/main" id="{8E32C81C-A143-F8E1-A69C-83791D6B454B}"/>
               </a:ext>
             </a:extLst>
           </p:cNvPr>
@@ -941,7 +941,7 @@
           <p:cNvPr id="4" name="日付プレースホルダー 3">
             <a:extLst>
               <a:ext uri="{FF2B5EF4-FFF2-40B4-BE49-F238E27FC236}">
-                <a16:creationId xmlns:a16="http://schemas.microsoft.com/office/drawing/2014/main" id="{319BF84D-2A8B-EA47-9C84-0E827DB82C84}"/>
+                <a16:creationId xmlns:a16="http://schemas.microsoft.com/office/drawing/2014/main" id="{26AD1B53-4669-2F87-FCFF-BC17F8110E5D}"/>
               </a:ext>
             </a:extLst>
           </p:cNvPr>
@@ -957,7 +957,7 @@
           <a:bodyPr/>
           <a:lstStyle/>
           <a:p>
-            <a:fld id="{845DA428-B679-420C-BAA7-14273AB10FAE}" type="datetimeFigureOut">
+            <a:fld id="{90CCB8DC-15BF-495C-B498-E4EF98C118AF}" type="datetimeFigureOut">
               <a:rPr kumimoji="1" lang="ja-JP" altLang="en-US" smtClean="0"/>
               <a:t>2026/7/30</a:t>
             </a:fld>
@@ -970,7 +970,7 @@
           <p:cNvPr id="5" name="フッター プレースホルダー 4">
             <a:extLst>
               <a:ext uri="{FF2B5EF4-FFF2-40B4-BE49-F238E27FC236}">
-                <a16:creationId xmlns:a16="http://schemas.microsoft.com/office/drawing/2014/main" id="{AD2F1410-F105-0F8B-2DB8-62C5A76B4F4B}"/>
+                <a16:creationId xmlns:a16="http://schemas.microsoft.com/office/drawing/2014/main" id="{DFD6D398-183F-AA53-6FA4-4610CB6BE7FD}"/>
               </a:ext>
             </a:extLst>
           </p:cNvPr>
@@ -995,7 +995,7 @@
           <p:cNvPr id="6" name="スライド番号プレースホルダー 5">
             <a:extLst>
               <a:ext uri="{FF2B5EF4-FFF2-40B4-BE49-F238E27FC236}">
-                <a16:creationId xmlns:a16="http://schemas.microsoft.com/office/drawing/2014/main" id="{51A43C86-B093-7A77-0F98-3CC0BE4D09EC}"/>
+                <a16:creationId xmlns:a16="http://schemas.microsoft.com/office/drawing/2014/main" id="{2E42E434-11EC-4607-0E22-69BBAAFD6F8D}"/>
               </a:ext>
             </a:extLst>
           </p:cNvPr>
@@ -1011,7 +1011,7 @@
           <a:bodyPr/>
           <a:lstStyle/>
           <a:p>
-            <a:fld id="{B9BAF22F-96E6-4AC4-91BF-FD57DBCF7BAB}" type="slidenum">
+            <a:fld id="{D349D00E-E6F1-4FD4-8C4A-E84958D0B49C}" type="slidenum">
               <a:rPr kumimoji="1" lang="ja-JP" altLang="en-US" smtClean="0"/>
               <a:t>‹#›</a:t>
             </a:fld>
@@ -1022,7 +1022,7 @@
     </p:spTree>
     <p:extLst>
       <p:ext uri="{BB962C8B-B14F-4D97-AF65-F5344CB8AC3E}">
-        <p14:creationId xmlns:p14="http://schemas.microsoft.com/office/powerpoint/2010/main" val="1731811748"/>
+        <p14:creationId xmlns:p14="http://schemas.microsoft.com/office/powerpoint/2010/main" val="16027786"/>
       </p:ext>
     </p:extLst>
   </p:cSld>
@@ -1054,7 +1054,7 @@
           <p:cNvPr id="2" name="タイトル 1">
             <a:extLst>
               <a:ext uri="{FF2B5EF4-FFF2-40B4-BE49-F238E27FC236}">
-                <a16:creationId xmlns:a16="http://schemas.microsoft.com/office/drawing/2014/main" id="{64038191-933C-116C-117D-2FED5105A417}"/>
+                <a16:creationId xmlns:a16="http://schemas.microsoft.com/office/drawing/2014/main" id="{3263545E-597B-32FE-EFD7-C377B06FEF98}"/>
               </a:ext>
             </a:extLst>
           </p:cNvPr>
@@ -1091,7 +1091,7 @@
           <p:cNvPr id="3" name="テキスト プレースホルダー 2">
             <a:extLst>
               <a:ext uri="{FF2B5EF4-FFF2-40B4-BE49-F238E27FC236}">
-                <a16:creationId xmlns:a16="http://schemas.microsoft.com/office/drawing/2014/main" id="{15CF57B6-6065-B74C-A589-AB0BD11D92E1}"/>
+                <a16:creationId xmlns:a16="http://schemas.microsoft.com/office/drawing/2014/main" id="{64010F91-4817-047D-56E5-BD5EA2E596CA}"/>
               </a:ext>
             </a:extLst>
           </p:cNvPr>
@@ -1216,7 +1216,7 @@
           <p:cNvPr id="4" name="日付プレースホルダー 3">
             <a:extLst>
               <a:ext uri="{FF2B5EF4-FFF2-40B4-BE49-F238E27FC236}">
-                <a16:creationId xmlns:a16="http://schemas.microsoft.com/office/drawing/2014/main" id="{C017088F-E005-980A-706D-65BA13AF38B8}"/>
+                <a16:creationId xmlns:a16="http://schemas.microsoft.com/office/drawing/2014/main" id="{35B38AEB-406F-03E8-645A-EB0E87DDDB6D}"/>
               </a:ext>
             </a:extLst>
           </p:cNvPr>
@@ -1232,7 +1232,7 @@
           <a:bodyPr/>
           <a:lstStyle/>
           <a:p>
-            <a:fld id="{845DA428-B679-420C-BAA7-14273AB10FAE}" type="datetimeFigureOut">
+            <a:fld id="{90CCB8DC-15BF-495C-B498-E4EF98C118AF}" type="datetimeFigureOut">
               <a:rPr kumimoji="1" lang="ja-JP" altLang="en-US" smtClean="0"/>
               <a:t>2026/7/30</a:t>
             </a:fld>
@@ -1245,7 +1245,7 @@
           <p:cNvPr id="5" name="フッター プレースホルダー 4">
             <a:extLst>
               <a:ext uri="{FF2B5EF4-FFF2-40B4-BE49-F238E27FC236}">
-                <a16:creationId xmlns:a16="http://schemas.microsoft.com/office/drawing/2014/main" id="{BE748D3A-0FC4-3287-3EB2-E3108557DB6F}"/>
+                <a16:creationId xmlns:a16="http://schemas.microsoft.com/office/drawing/2014/main" id="{33327FEA-87E8-D977-EEBC-09F78A42D920}"/>
               </a:ext>
             </a:extLst>
           </p:cNvPr>
@@ -1270,7 +1270,7 @@
           <p:cNvPr id="6" name="スライド番号プレースホルダー 5">
             <a:extLst>
               <a:ext uri="{FF2B5EF4-FFF2-40B4-BE49-F238E27FC236}">
-                <a16:creationId xmlns:a16="http://schemas.microsoft.com/office/drawing/2014/main" id="{76147AC2-821C-3C9A-416D-4253AAA17B4F}"/>
+                <a16:creationId xmlns:a16="http://schemas.microsoft.com/office/drawing/2014/main" id="{CDD78C5A-3ABF-31EB-05AD-67C48539E465}"/>
               </a:ext>
             </a:extLst>
           </p:cNvPr>
@@ -1286,7 +1286,7 @@
           <a:bodyPr/>
           <a:lstStyle/>
           <a:p>
-            <a:fld id="{B9BAF22F-96E6-4AC4-91BF-FD57DBCF7BAB}" type="slidenum">
+            <a:fld id="{D349D00E-E6F1-4FD4-8C4A-E84958D0B49C}" type="slidenum">
               <a:rPr kumimoji="1" lang="ja-JP" altLang="en-US" smtClean="0"/>
               <a:t>‹#›</a:t>
             </a:fld>
@@ -1297,7 +1297,7 @@
     </p:spTree>
     <p:extLst>
       <p:ext uri="{BB962C8B-B14F-4D97-AF65-F5344CB8AC3E}">
-        <p14:creationId xmlns:p14="http://schemas.microsoft.com/office/powerpoint/2010/main" val="759978916"/>
+        <p14:creationId xmlns:p14="http://schemas.microsoft.com/office/powerpoint/2010/main" val="1041148006"/>
       </p:ext>
     </p:extLst>
   </p:cSld>
@@ -1329,7 +1329,7 @@
           <p:cNvPr id="2" name="タイトル 1">
             <a:extLst>
               <a:ext uri="{FF2B5EF4-FFF2-40B4-BE49-F238E27FC236}">
-                <a16:creationId xmlns:a16="http://schemas.microsoft.com/office/drawing/2014/main" id="{C6C3DB7E-38A2-31B7-E389-FC62602C9A4B}"/>
+                <a16:creationId xmlns:a16="http://schemas.microsoft.com/office/drawing/2014/main" id="{BC8675CA-0FA9-2A9E-B846-81FDCEEFDA21}"/>
               </a:ext>
             </a:extLst>
           </p:cNvPr>
@@ -1357,7 +1357,7 @@
           <p:cNvPr id="3" name="コンテンツ プレースホルダー 2">
             <a:extLst>
               <a:ext uri="{FF2B5EF4-FFF2-40B4-BE49-F238E27FC236}">
-                <a16:creationId xmlns:a16="http://schemas.microsoft.com/office/drawing/2014/main" id="{0955CDFB-F3D8-F7BD-93BD-29F7234B970D}"/>
+                <a16:creationId xmlns:a16="http://schemas.microsoft.com/office/drawing/2014/main" id="{8432C423-0B07-FA46-C293-4F7DCC1F855F}"/>
               </a:ext>
             </a:extLst>
           </p:cNvPr>
@@ -1451,7 +1451,7 @@
           <p:cNvPr id="4" name="コンテンツ プレースホルダー 3">
             <a:extLst>
               <a:ext uri="{FF2B5EF4-FFF2-40B4-BE49-F238E27FC236}">
-                <a16:creationId xmlns:a16="http://schemas.microsoft.com/office/drawing/2014/main" id="{964F694C-D046-DD6F-B5A4-50B8073CEC81}"/>
+                <a16:creationId xmlns:a16="http://schemas.microsoft.com/office/drawing/2014/main" id="{76C7298C-CC93-C98F-4724-2CFCE299381C}"/>
               </a:ext>
             </a:extLst>
           </p:cNvPr>
@@ -1545,7 +1545,7 @@
           <p:cNvPr id="5" name="日付プレースホルダー 4">
             <a:extLst>
               <a:ext uri="{FF2B5EF4-FFF2-40B4-BE49-F238E27FC236}">
-                <a16:creationId xmlns:a16="http://schemas.microsoft.com/office/drawing/2014/main" id="{CB8F825C-CADD-F538-E9FF-1EA37390DC38}"/>
+                <a16:creationId xmlns:a16="http://schemas.microsoft.com/office/drawing/2014/main" id="{5DF49985-6350-5957-D427-0A8FD8EFC3C5}"/>
               </a:ext>
             </a:extLst>
           </p:cNvPr>
@@ -1561,7 +1561,7 @@
           <a:bodyPr/>
           <a:lstStyle/>
           <a:p>
-            <a:fld id="{845DA428-B679-420C-BAA7-14273AB10FAE}" type="datetimeFigureOut">
+            <a:fld id="{90CCB8DC-15BF-495C-B498-E4EF98C118AF}" type="datetimeFigureOut">
               <a:rPr kumimoji="1" lang="ja-JP" altLang="en-US" smtClean="0"/>
               <a:t>2026/7/30</a:t>
             </a:fld>
@@ -1574,7 +1574,7 @@
           <p:cNvPr id="6" name="フッター プレースホルダー 5">
             <a:extLst>
               <a:ext uri="{FF2B5EF4-FFF2-40B4-BE49-F238E27FC236}">
-                <a16:creationId xmlns:a16="http://schemas.microsoft.com/office/drawing/2014/main" id="{0DEADC82-D53D-1083-CB2A-AA05087467C0}"/>
+                <a16:creationId xmlns:a16="http://schemas.microsoft.com/office/drawing/2014/main" id="{35EB4EC8-BE43-4E9C-5760-E968B70D05B7}"/>
               </a:ext>
             </a:extLst>
           </p:cNvPr>
@@ -1599,7 +1599,7 @@
           <p:cNvPr id="7" name="スライド番号プレースホルダー 6">
             <a:extLst>
               <a:ext uri="{FF2B5EF4-FFF2-40B4-BE49-F238E27FC236}">
-                <a16:creationId xmlns:a16="http://schemas.microsoft.com/office/drawing/2014/main" id="{961F8938-EF08-9BA0-75AE-A0C641EB1DC2}"/>
+                <a16:creationId xmlns:a16="http://schemas.microsoft.com/office/drawing/2014/main" id="{313049D8-179F-7911-CD51-88D48FC223AF}"/>
               </a:ext>
             </a:extLst>
           </p:cNvPr>
@@ -1615,7 +1615,7 @@
           <a:bodyPr/>
           <a:lstStyle/>
           <a:p>
-            <a:fld id="{B9BAF22F-96E6-4AC4-91BF-FD57DBCF7BAB}" type="slidenum">
+            <a:fld id="{D349D00E-E6F1-4FD4-8C4A-E84958D0B49C}" type="slidenum">
               <a:rPr kumimoji="1" lang="ja-JP" altLang="en-US" smtClean="0"/>
               <a:t>‹#›</a:t>
             </a:fld>
@@ -1626,7 +1626,7 @@
     </p:spTree>
     <p:extLst>
       <p:ext uri="{BB962C8B-B14F-4D97-AF65-F5344CB8AC3E}">
-        <p14:creationId xmlns:p14="http://schemas.microsoft.com/office/powerpoint/2010/main" val="420538290"/>
+        <p14:creationId xmlns:p14="http://schemas.microsoft.com/office/powerpoint/2010/main" val="1966348348"/>
       </p:ext>
     </p:extLst>
   </p:cSld>
@@ -1658,7 +1658,7 @@
           <p:cNvPr id="2" name="タイトル 1">
             <a:extLst>
               <a:ext uri="{FF2B5EF4-FFF2-40B4-BE49-F238E27FC236}">
-                <a16:creationId xmlns:a16="http://schemas.microsoft.com/office/drawing/2014/main" id="{23F98A77-ABCD-D1AF-10B3-E9C4FD4739FC}"/>
+                <a16:creationId xmlns:a16="http://schemas.microsoft.com/office/drawing/2014/main" id="{0BE9EDE9-6C55-2999-9E5F-F2D60B36FB07}"/>
               </a:ext>
             </a:extLst>
           </p:cNvPr>
@@ -1691,7 +1691,7 @@
           <p:cNvPr id="3" name="テキスト プレースホルダー 2">
             <a:extLst>
               <a:ext uri="{FF2B5EF4-FFF2-40B4-BE49-F238E27FC236}">
-                <a16:creationId xmlns:a16="http://schemas.microsoft.com/office/drawing/2014/main" id="{F7936E7D-6DB5-7494-BD3C-503D607558CB}"/>
+                <a16:creationId xmlns:a16="http://schemas.microsoft.com/office/drawing/2014/main" id="{6A366452-4123-DDFB-F27B-E5982148C8FE}"/>
               </a:ext>
             </a:extLst>
           </p:cNvPr>
@@ -1762,7 +1762,7 @@
           <p:cNvPr id="4" name="コンテンツ プレースホルダー 3">
             <a:extLst>
               <a:ext uri="{FF2B5EF4-FFF2-40B4-BE49-F238E27FC236}">
-                <a16:creationId xmlns:a16="http://schemas.microsoft.com/office/drawing/2014/main" id="{A9726546-4C2C-AABB-6C33-D5FF7ADA6696}"/>
+                <a16:creationId xmlns:a16="http://schemas.microsoft.com/office/drawing/2014/main" id="{3389F55F-A11A-4E55-86DA-F4B807F21FD7}"/>
               </a:ext>
             </a:extLst>
           </p:cNvPr>
@@ -1856,7 +1856,7 @@
           <p:cNvPr id="5" name="テキスト プレースホルダー 4">
             <a:extLst>
               <a:ext uri="{FF2B5EF4-FFF2-40B4-BE49-F238E27FC236}">
-                <a16:creationId xmlns:a16="http://schemas.microsoft.com/office/drawing/2014/main" id="{9E8B5EEA-EABD-6B31-0BB3-479C1CF14429}"/>
+                <a16:creationId xmlns:a16="http://schemas.microsoft.com/office/drawing/2014/main" id="{90D59863-6E4F-CCE4-C4E2-55D2A5C3D4C2}"/>
               </a:ext>
             </a:extLst>
           </p:cNvPr>
@@ -1927,7 +1927,7 @@
           <p:cNvPr id="6" name="コンテンツ プレースホルダー 5">
             <a:extLst>
               <a:ext uri="{FF2B5EF4-FFF2-40B4-BE49-F238E27FC236}">
-                <a16:creationId xmlns:a16="http://schemas.microsoft.com/office/drawing/2014/main" id="{C0717873-F958-321E-259A-E78F059E29B7}"/>
+                <a16:creationId xmlns:a16="http://schemas.microsoft.com/office/drawing/2014/main" id="{30ED1512-D3A6-5BD8-40B3-56A89838CC64}"/>
               </a:ext>
             </a:extLst>
           </p:cNvPr>
@@ -2021,7 +2021,7 @@
           <p:cNvPr id="7" name="日付プレースホルダー 6">
             <a:extLst>
               <a:ext uri="{FF2B5EF4-FFF2-40B4-BE49-F238E27FC236}">
-                <a16:creationId xmlns:a16="http://schemas.microsoft.com/office/drawing/2014/main" id="{9C44DF15-B41F-6D7E-4AFB-514F1E437F0A}"/>
+                <a16:creationId xmlns:a16="http://schemas.microsoft.com/office/drawing/2014/main" id="{21C13FCB-A03C-16DC-6D2A-BD327A0AD546}"/>
               </a:ext>
             </a:extLst>
           </p:cNvPr>
@@ -2037,7 +2037,7 @@
           <a:bodyPr/>
           <a:lstStyle/>
           <a:p>
-            <a:fld id="{845DA428-B679-420C-BAA7-14273AB10FAE}" type="datetimeFigureOut">
+            <a:fld id="{90CCB8DC-15BF-495C-B498-E4EF98C118AF}" type="datetimeFigureOut">
               <a:rPr kumimoji="1" lang="ja-JP" altLang="en-US" smtClean="0"/>
               <a:t>2026/7/30</a:t>
             </a:fld>
@@ -2050,7 +2050,7 @@
           <p:cNvPr id="8" name="フッター プレースホルダー 7">
             <a:extLst>
               <a:ext uri="{FF2B5EF4-FFF2-40B4-BE49-F238E27FC236}">
-                <a16:creationId xmlns:a16="http://schemas.microsoft.com/office/drawing/2014/main" id="{3C4D399D-D523-C7D2-C19D-A54B7263B770}"/>
+                <a16:creationId xmlns:a16="http://schemas.microsoft.com/office/drawing/2014/main" id="{22865FBD-7734-07D2-01E6-73FD1B0A9279}"/>
               </a:ext>
             </a:extLst>
           </p:cNvPr>
@@ -2075,7 +2075,7 @@
           <p:cNvPr id="9" name="スライド番号プレースホルダー 8">
             <a:extLst>
               <a:ext uri="{FF2B5EF4-FFF2-40B4-BE49-F238E27FC236}">
-                <a16:creationId xmlns:a16="http://schemas.microsoft.com/office/drawing/2014/main" id="{DCC8D709-C72A-09C9-1BC7-C0FAC62C191A}"/>
+                <a16:creationId xmlns:a16="http://schemas.microsoft.com/office/drawing/2014/main" id="{80AC42D4-3A15-B16F-A145-99E53FEB052E}"/>
               </a:ext>
             </a:extLst>
           </p:cNvPr>
@@ -2091,7 +2091,7 @@
           <a:bodyPr/>
           <a:lstStyle/>
           <a:p>
-            <a:fld id="{B9BAF22F-96E6-4AC4-91BF-FD57DBCF7BAB}" type="slidenum">
+            <a:fld id="{D349D00E-E6F1-4FD4-8C4A-E84958D0B49C}" type="slidenum">
               <a:rPr kumimoji="1" lang="ja-JP" altLang="en-US" smtClean="0"/>
               <a:t>‹#›</a:t>
             </a:fld>
@@ -2102,7 +2102,7 @@
     </p:spTree>
     <p:extLst>
       <p:ext uri="{BB962C8B-B14F-4D97-AF65-F5344CB8AC3E}">
-        <p14:creationId xmlns:p14="http://schemas.microsoft.com/office/powerpoint/2010/main" val="1748539697"/>
+        <p14:creationId xmlns:p14="http://schemas.microsoft.com/office/powerpoint/2010/main" val="1603718849"/>
       </p:ext>
     </p:extLst>
   </p:cSld>
@@ -2134,7 +2134,7 @@
           <p:cNvPr id="2" name="タイトル 1">
             <a:extLst>
               <a:ext uri="{FF2B5EF4-FFF2-40B4-BE49-F238E27FC236}">
-                <a16:creationId xmlns:a16="http://schemas.microsoft.com/office/drawing/2014/main" id="{64DB9384-22E0-2CB7-4D5B-1011135F5AF8}"/>
+                <a16:creationId xmlns:a16="http://schemas.microsoft.com/office/drawing/2014/main" id="{3FCFB4F4-AED1-0543-008B-ECE50CF84105}"/>
               </a:ext>
             </a:extLst>
           </p:cNvPr>
@@ -2162,7 +2162,7 @@
           <p:cNvPr id="3" name="日付プレースホルダー 2">
             <a:extLst>
               <a:ext uri="{FF2B5EF4-FFF2-40B4-BE49-F238E27FC236}">
-                <a16:creationId xmlns:a16="http://schemas.microsoft.com/office/drawing/2014/main" id="{62048F4B-0100-86B5-BA2D-1BF78471F955}"/>
+                <a16:creationId xmlns:a16="http://schemas.microsoft.com/office/drawing/2014/main" id="{6DA10B5F-0486-A6C2-F51D-C5489B8D9EE8}"/>
               </a:ext>
             </a:extLst>
           </p:cNvPr>
@@ -2178,7 +2178,7 @@
           <a:bodyPr/>
           <a:lstStyle/>
           <a:p>
-            <a:fld id="{845DA428-B679-420C-BAA7-14273AB10FAE}" type="datetimeFigureOut">
+            <a:fld id="{90CCB8DC-15BF-495C-B498-E4EF98C118AF}" type="datetimeFigureOut">
               <a:rPr kumimoji="1" lang="ja-JP" altLang="en-US" smtClean="0"/>
               <a:t>2026/7/30</a:t>
             </a:fld>
@@ -2191,7 +2191,7 @@
           <p:cNvPr id="4" name="フッター プレースホルダー 3">
             <a:extLst>
               <a:ext uri="{FF2B5EF4-FFF2-40B4-BE49-F238E27FC236}">
-                <a16:creationId xmlns:a16="http://schemas.microsoft.com/office/drawing/2014/main" id="{8D4AB18E-8E1E-8B27-6276-4F73DD1041D8}"/>
+                <a16:creationId xmlns:a16="http://schemas.microsoft.com/office/drawing/2014/main" id="{4665B03D-7E80-D9E3-F72E-454D06FF0B58}"/>
               </a:ext>
             </a:extLst>
           </p:cNvPr>
@@ -2216,7 +2216,7 @@
           <p:cNvPr id="5" name="スライド番号プレースホルダー 4">
             <a:extLst>
               <a:ext uri="{FF2B5EF4-FFF2-40B4-BE49-F238E27FC236}">
-                <a16:creationId xmlns:a16="http://schemas.microsoft.com/office/drawing/2014/main" id="{FD303666-BE73-2A86-E1B8-23F3C0DFD283}"/>
+                <a16:creationId xmlns:a16="http://schemas.microsoft.com/office/drawing/2014/main" id="{9B88C211-0695-2636-684A-66E541FBA800}"/>
               </a:ext>
             </a:extLst>
           </p:cNvPr>
@@ -2232,7 +2232,7 @@
           <a:bodyPr/>
           <a:lstStyle/>
           <a:p>
-            <a:fld id="{B9BAF22F-96E6-4AC4-91BF-FD57DBCF7BAB}" type="slidenum">
+            <a:fld id="{D349D00E-E6F1-4FD4-8C4A-E84958D0B49C}" type="slidenum">
               <a:rPr kumimoji="1" lang="ja-JP" altLang="en-US" smtClean="0"/>
               <a:t>‹#›</a:t>
             </a:fld>
@@ -2243,7 +2243,7 @@
     </p:spTree>
     <p:extLst>
       <p:ext uri="{BB962C8B-B14F-4D97-AF65-F5344CB8AC3E}">
-        <p14:creationId xmlns:p14="http://schemas.microsoft.com/office/powerpoint/2010/main" val="1728789050"/>
+        <p14:creationId xmlns:p14="http://schemas.microsoft.com/office/powerpoint/2010/main" val="945288884"/>
       </p:ext>
     </p:extLst>
   </p:cSld>
@@ -2275,7 +2275,7 @@
           <p:cNvPr id="2" name="日付プレースホルダー 1">
             <a:extLst>
               <a:ext uri="{FF2B5EF4-FFF2-40B4-BE49-F238E27FC236}">
-                <a16:creationId xmlns:a16="http://schemas.microsoft.com/office/drawing/2014/main" id="{FB72BBAA-1485-BEF6-A763-E20CECABF0C0}"/>
+                <a16:creationId xmlns:a16="http://schemas.microsoft.com/office/drawing/2014/main" id="{2C617698-599A-E1C1-6D36-8E1266D9E2C2}"/>
               </a:ext>
             </a:extLst>
           </p:cNvPr>
@@ -2291,7 +2291,7 @@
           <a:bodyPr/>
           <a:lstStyle/>
           <a:p>
-            <a:fld id="{845DA428-B679-420C-BAA7-14273AB10FAE}" type="datetimeFigureOut">
+            <a:fld id="{90CCB8DC-15BF-495C-B498-E4EF98C118AF}" type="datetimeFigureOut">
               <a:rPr kumimoji="1" lang="ja-JP" altLang="en-US" smtClean="0"/>
               <a:t>2026/7/30</a:t>
             </a:fld>
@@ -2304,7 +2304,7 @@
           <p:cNvPr id="3" name="フッター プレースホルダー 2">
             <a:extLst>
               <a:ext uri="{FF2B5EF4-FFF2-40B4-BE49-F238E27FC236}">
-                <a16:creationId xmlns:a16="http://schemas.microsoft.com/office/drawing/2014/main" id="{92FF4011-27C2-1FC5-4772-545EFFCD07E6}"/>
+                <a16:creationId xmlns:a16="http://schemas.microsoft.com/office/drawing/2014/main" id="{87D393FB-C23F-73BE-8B9F-00DDF30BD8A5}"/>
               </a:ext>
             </a:extLst>
           </p:cNvPr>
@@ -2329,7 +2329,7 @@
           <p:cNvPr id="4" name="スライド番号プレースホルダー 3">
             <a:extLst>
               <a:ext uri="{FF2B5EF4-FFF2-40B4-BE49-F238E27FC236}">
-                <a16:creationId xmlns:a16="http://schemas.microsoft.com/office/drawing/2014/main" id="{85B0F5AB-E7AA-289E-3F1A-5933DEC78865}"/>
+                <a16:creationId xmlns:a16="http://schemas.microsoft.com/office/drawing/2014/main" id="{75319808-C596-3A43-8751-B054B1642A99}"/>
               </a:ext>
             </a:extLst>
           </p:cNvPr>
@@ -2345,7 +2345,7 @@
           <a:bodyPr/>
           <a:lstStyle/>
           <a:p>
-            <a:fld id="{B9BAF22F-96E6-4AC4-91BF-FD57DBCF7BAB}" type="slidenum">
+            <a:fld id="{D349D00E-E6F1-4FD4-8C4A-E84958D0B49C}" type="slidenum">
               <a:rPr kumimoji="1" lang="ja-JP" altLang="en-US" smtClean="0"/>
               <a:t>‹#›</a:t>
             </a:fld>
@@ -2356,7 +2356,7 @@
     </p:spTree>
     <p:extLst>
       <p:ext uri="{BB962C8B-B14F-4D97-AF65-F5344CB8AC3E}">
-        <p14:creationId xmlns:p14="http://schemas.microsoft.com/office/powerpoint/2010/main" val="3200695031"/>
+        <p14:creationId xmlns:p14="http://schemas.microsoft.com/office/powerpoint/2010/main" val="1135073120"/>
       </p:ext>
     </p:extLst>
   </p:cSld>
@@ -2388,7 +2388,7 @@
           <p:cNvPr id="2" name="タイトル 1">
             <a:extLst>
               <a:ext uri="{FF2B5EF4-FFF2-40B4-BE49-F238E27FC236}">
-                <a16:creationId xmlns:a16="http://schemas.microsoft.com/office/drawing/2014/main" id="{713F046E-CAE7-9798-E70F-5449F2EA610A}"/>
+                <a16:creationId xmlns:a16="http://schemas.microsoft.com/office/drawing/2014/main" id="{155FE04E-3555-BEC7-D5A6-1FA63349CE40}"/>
               </a:ext>
             </a:extLst>
           </p:cNvPr>
@@ -2425,7 +2425,7 @@
           <p:cNvPr id="3" name="コンテンツ プレースホルダー 2">
             <a:extLst>
               <a:ext uri="{FF2B5EF4-FFF2-40B4-BE49-F238E27FC236}">
-                <a16:creationId xmlns:a16="http://schemas.microsoft.com/office/drawing/2014/main" id="{6E9C9D26-EE53-ABC7-60F2-FB6FC117C8A9}"/>
+                <a16:creationId xmlns:a16="http://schemas.microsoft.com/office/drawing/2014/main" id="{E60A2971-9C88-B299-85FE-7EC5B767DEC6}"/>
               </a:ext>
             </a:extLst>
           </p:cNvPr>
@@ -2547,7 +2547,7 @@
           <p:cNvPr id="4" name="テキスト プレースホルダー 3">
             <a:extLst>
               <a:ext uri="{FF2B5EF4-FFF2-40B4-BE49-F238E27FC236}">
-                <a16:creationId xmlns:a16="http://schemas.microsoft.com/office/drawing/2014/main" id="{A9347724-3345-3670-9088-458C28384428}"/>
+                <a16:creationId xmlns:a16="http://schemas.microsoft.com/office/drawing/2014/main" id="{D004A6F1-7512-C80F-FD9B-E540C3854B1B}"/>
               </a:ext>
             </a:extLst>
           </p:cNvPr>
@@ -2618,7 +2618,7 @@
           <p:cNvPr id="5" name="日付プレースホルダー 4">
             <a:extLst>
               <a:ext uri="{FF2B5EF4-FFF2-40B4-BE49-F238E27FC236}">
-                <a16:creationId xmlns:a16="http://schemas.microsoft.com/office/drawing/2014/main" id="{2F2E8A12-8DF0-6CD8-3936-9DAE172A3536}"/>
+                <a16:creationId xmlns:a16="http://schemas.microsoft.com/office/drawing/2014/main" id="{ABEAB666-CF1C-6B9C-A09C-0AEFAB66F92F}"/>
               </a:ext>
             </a:extLst>
           </p:cNvPr>
@@ -2634,7 +2634,7 @@
           <a:bodyPr/>
           <a:lstStyle/>
           <a:p>
-            <a:fld id="{845DA428-B679-420C-BAA7-14273AB10FAE}" type="datetimeFigureOut">
+            <a:fld id="{90CCB8DC-15BF-495C-B498-E4EF98C118AF}" type="datetimeFigureOut">
               <a:rPr kumimoji="1" lang="ja-JP" altLang="en-US" smtClean="0"/>
               <a:t>2026/7/30</a:t>
             </a:fld>
@@ -2647,7 +2647,7 @@
           <p:cNvPr id="6" name="フッター プレースホルダー 5">
             <a:extLst>
               <a:ext uri="{FF2B5EF4-FFF2-40B4-BE49-F238E27FC236}">
-                <a16:creationId xmlns:a16="http://schemas.microsoft.com/office/drawing/2014/main" id="{1437DC9A-C7C7-A8E2-512D-928809E65CF0}"/>
+                <a16:creationId xmlns:a16="http://schemas.microsoft.com/office/drawing/2014/main" id="{7C3E621E-C1E5-08D8-995A-2412F143EFF8}"/>
               </a:ext>
             </a:extLst>
           </p:cNvPr>
@@ -2672,7 +2672,7 @@
           <p:cNvPr id="7" name="スライド番号プレースホルダー 6">
             <a:extLst>
               <a:ext uri="{FF2B5EF4-FFF2-40B4-BE49-F238E27FC236}">
-                <a16:creationId xmlns:a16="http://schemas.microsoft.com/office/drawing/2014/main" id="{01085E55-B68F-580F-8BCE-E3F21999DF0E}"/>
+                <a16:creationId xmlns:a16="http://schemas.microsoft.com/office/drawing/2014/main" id="{AEFB134D-5F6F-4842-58FF-D741A5FE307C}"/>
               </a:ext>
             </a:extLst>
           </p:cNvPr>
@@ -2688,7 +2688,7 @@
           <a:bodyPr/>
           <a:lstStyle/>
           <a:p>
-            <a:fld id="{B9BAF22F-96E6-4AC4-91BF-FD57DBCF7BAB}" type="slidenum">
+            <a:fld id="{D349D00E-E6F1-4FD4-8C4A-E84958D0B49C}" type="slidenum">
               <a:rPr kumimoji="1" lang="ja-JP" altLang="en-US" smtClean="0"/>
               <a:t>‹#›</a:t>
             </a:fld>
@@ -2699,7 +2699,7 @@
     </p:spTree>
     <p:extLst>
       <p:ext uri="{BB962C8B-B14F-4D97-AF65-F5344CB8AC3E}">
-        <p14:creationId xmlns:p14="http://schemas.microsoft.com/office/powerpoint/2010/main" val="4139748535"/>
+        <p14:creationId xmlns:p14="http://schemas.microsoft.com/office/powerpoint/2010/main" val="2628203711"/>
       </p:ext>
     </p:extLst>
   </p:cSld>
@@ -2731,7 +2731,7 @@
           <p:cNvPr id="2" name="タイトル 1">
             <a:extLst>
               <a:ext uri="{FF2B5EF4-FFF2-40B4-BE49-F238E27FC236}">
-                <a16:creationId xmlns:a16="http://schemas.microsoft.com/office/drawing/2014/main" id="{32A4E7C3-CC5E-2FED-A4DB-0848988F907D}"/>
+                <a16:creationId xmlns:a16="http://schemas.microsoft.com/office/drawing/2014/main" id="{D6FBCDF3-51E4-2FBD-1D24-EF7E14763496}"/>
               </a:ext>
             </a:extLst>
           </p:cNvPr>
@@ -2768,7 +2768,7 @@
           <p:cNvPr id="3" name="図プレースホルダー 2">
             <a:extLst>
               <a:ext uri="{FF2B5EF4-FFF2-40B4-BE49-F238E27FC236}">
-                <a16:creationId xmlns:a16="http://schemas.microsoft.com/office/drawing/2014/main" id="{4D9FB1BB-0B07-E00E-8028-9B2EACE5D0E4}"/>
+                <a16:creationId xmlns:a16="http://schemas.microsoft.com/office/drawing/2014/main" id="{B33D7CC5-E200-4191-3A86-52944F65229F}"/>
               </a:ext>
             </a:extLst>
           </p:cNvPr>
@@ -2835,7 +2835,7 @@
           <p:cNvPr id="4" name="テキスト プレースホルダー 3">
             <a:extLst>
               <a:ext uri="{FF2B5EF4-FFF2-40B4-BE49-F238E27FC236}">
-                <a16:creationId xmlns:a16="http://schemas.microsoft.com/office/drawing/2014/main" id="{23F19554-6060-BE3C-8284-BC3E1E82F6BE}"/>
+                <a16:creationId xmlns:a16="http://schemas.microsoft.com/office/drawing/2014/main" id="{1E591D53-8F8E-5BCB-9543-0A63A3A5586C}"/>
               </a:ext>
             </a:extLst>
           </p:cNvPr>
@@ -2906,7 +2906,7 @@
           <p:cNvPr id="5" name="日付プレースホルダー 4">
             <a:extLst>
               <a:ext uri="{FF2B5EF4-FFF2-40B4-BE49-F238E27FC236}">
-                <a16:creationId xmlns:a16="http://schemas.microsoft.com/office/drawing/2014/main" id="{8D9ABB3C-3820-630E-882C-D60ADBEC20AF}"/>
+                <a16:creationId xmlns:a16="http://schemas.microsoft.com/office/drawing/2014/main" id="{C75FABD9-E0D5-1F91-4A68-722A4165D615}"/>
               </a:ext>
             </a:extLst>
           </p:cNvPr>
@@ -2922,7 +2922,7 @@
           <a:bodyPr/>
           <a:lstStyle/>
           <a:p>
-            <a:fld id="{845DA428-B679-420C-BAA7-14273AB10FAE}" type="datetimeFigureOut">
+            <a:fld id="{90CCB8DC-15BF-495C-B498-E4EF98C118AF}" type="datetimeFigureOut">
               <a:rPr kumimoji="1" lang="ja-JP" altLang="en-US" smtClean="0"/>
               <a:t>2026/7/30</a:t>
             </a:fld>
@@ -2935,7 +2935,7 @@
           <p:cNvPr id="6" name="フッター プレースホルダー 5">
             <a:extLst>
               <a:ext uri="{FF2B5EF4-FFF2-40B4-BE49-F238E27FC236}">
-                <a16:creationId xmlns:a16="http://schemas.microsoft.com/office/drawing/2014/main" id="{811CA7E9-145C-D4FA-7A8D-DAE7DEBEC956}"/>
+                <a16:creationId xmlns:a16="http://schemas.microsoft.com/office/drawing/2014/main" id="{D3AAA28E-32D0-06D0-3C8A-48AEC133AD86}"/>
               </a:ext>
             </a:extLst>
           </p:cNvPr>
@@ -2960,7 +2960,7 @@
           <p:cNvPr id="7" name="スライド番号プレースホルダー 6">
             <a:extLst>
               <a:ext uri="{FF2B5EF4-FFF2-40B4-BE49-F238E27FC236}">
-                <a16:creationId xmlns:a16="http://schemas.microsoft.com/office/drawing/2014/main" id="{15A18A74-F9AA-4C0C-A57F-6676BBB8B99B}"/>
+                <a16:creationId xmlns:a16="http://schemas.microsoft.com/office/drawing/2014/main" id="{20E6FC25-931D-9E3A-1B26-D9AA003C990F}"/>
               </a:ext>
             </a:extLst>
           </p:cNvPr>
@@ -2976,7 +2976,7 @@
           <a:bodyPr/>
           <a:lstStyle/>
           <a:p>
-            <a:fld id="{B9BAF22F-96E6-4AC4-91BF-FD57DBCF7BAB}" type="slidenum">
+            <a:fld id="{D349D00E-E6F1-4FD4-8C4A-E84958D0B49C}" type="slidenum">
               <a:rPr kumimoji="1" lang="ja-JP" altLang="en-US" smtClean="0"/>
               <a:t>‹#›</a:t>
             </a:fld>
@@ -2987,7 +2987,7 @@
     </p:spTree>
     <p:extLst>
       <p:ext uri="{BB962C8B-B14F-4D97-AF65-F5344CB8AC3E}">
-        <p14:creationId xmlns:p14="http://schemas.microsoft.com/office/powerpoint/2010/main" val="1777916045"/>
+        <p14:creationId xmlns:p14="http://schemas.microsoft.com/office/powerpoint/2010/main" val="1064481831"/>
       </p:ext>
     </p:extLst>
   </p:cSld>
@@ -3024,7 +3024,7 @@
           <p:cNvPr id="2" name="タイトル プレースホルダー 1">
             <a:extLst>
               <a:ext uri="{FF2B5EF4-FFF2-40B4-BE49-F238E27FC236}">
-                <a16:creationId xmlns:a16="http://schemas.microsoft.com/office/drawing/2014/main" id="{7435E91F-C40E-8219-C6CB-0AE7544C901E}"/>
+                <a16:creationId xmlns:a16="http://schemas.microsoft.com/office/drawing/2014/main" id="{A751990D-78F4-5550-E39C-5E646190E840}"/>
               </a:ext>
             </a:extLst>
           </p:cNvPr>
@@ -3062,7 +3062,7 @@
           <p:cNvPr id="3" name="テキスト プレースホルダー 2">
             <a:extLst>
               <a:ext uri="{FF2B5EF4-FFF2-40B4-BE49-F238E27FC236}">
-                <a16:creationId xmlns:a16="http://schemas.microsoft.com/office/drawing/2014/main" id="{A4A67B83-265B-A3A4-263E-2E93E5AE9CF1}"/>
+                <a16:creationId xmlns:a16="http://schemas.microsoft.com/office/drawing/2014/main" id="{AB7EDB5C-5525-5DB5-554F-19FA0E337E19}"/>
               </a:ext>
             </a:extLst>
           </p:cNvPr>
@@ -3161,7 +3161,7 @@
           <p:cNvPr id="4" name="日付プレースホルダー 3">
             <a:extLst>
               <a:ext uri="{FF2B5EF4-FFF2-40B4-BE49-F238E27FC236}">
-                <a16:creationId xmlns:a16="http://schemas.microsoft.com/office/drawing/2014/main" id="{A44CC716-8B5E-1598-25D8-F39A76CD2AD2}"/>
+                <a16:creationId xmlns:a16="http://schemas.microsoft.com/office/drawing/2014/main" id="{9DAEBE15-B04A-847E-2E76-6369FFA3453C}"/>
               </a:ext>
             </a:extLst>
           </p:cNvPr>
@@ -3195,7 +3195,7 @@
             </a:lvl1pPr>
           </a:lstStyle>
           <a:p>
-            <a:fld id="{845DA428-B679-420C-BAA7-14273AB10FAE}" type="datetimeFigureOut">
+            <a:fld id="{90CCB8DC-15BF-495C-B498-E4EF98C118AF}" type="datetimeFigureOut">
               <a:rPr kumimoji="1" lang="ja-JP" altLang="en-US" smtClean="0"/>
               <a:t>2026/7/30</a:t>
             </a:fld>
@@ -3208,7 +3208,7 @@
           <p:cNvPr id="5" name="フッター プレースホルダー 4">
             <a:extLst>
               <a:ext uri="{FF2B5EF4-FFF2-40B4-BE49-F238E27FC236}">
-                <a16:creationId xmlns:a16="http://schemas.microsoft.com/office/drawing/2014/main" id="{E1042ED4-D6EB-7BF8-89E1-CBCF9FD25BA5}"/>
+                <a16:creationId xmlns:a16="http://schemas.microsoft.com/office/drawing/2014/main" id="{0BE60943-16C2-966D-3E4D-4665F37B8522}"/>
               </a:ext>
             </a:extLst>
           </p:cNvPr>
@@ -3251,7 +3251,7 @@
           <p:cNvPr id="6" name="スライド番号プレースホルダー 5">
             <a:extLst>
               <a:ext uri="{FF2B5EF4-FFF2-40B4-BE49-F238E27FC236}">
-                <a16:creationId xmlns:a16="http://schemas.microsoft.com/office/drawing/2014/main" id="{2E966B8D-E57F-BAAC-DB91-6E6C0E9FD593}"/>
+                <a16:creationId xmlns:a16="http://schemas.microsoft.com/office/drawing/2014/main" id="{6D67AF1D-AF3E-3F45-4542-934BC1C2E156}"/>
               </a:ext>
             </a:extLst>
           </p:cNvPr>
@@ -3285,7 +3285,7 @@
             </a:lvl1pPr>
           </a:lstStyle>
           <a:p>
-            <a:fld id="{B9BAF22F-96E6-4AC4-91BF-FD57DBCF7BAB}" type="slidenum">
+            <a:fld id="{D349D00E-E6F1-4FD4-8C4A-E84958D0B49C}" type="slidenum">
               <a:rPr kumimoji="1" lang="ja-JP" altLang="en-US" smtClean="0"/>
               <a:t>‹#›</a:t>
             </a:fld>
@@ -3296,7 +3296,7 @@
     </p:spTree>
     <p:extLst>
       <p:ext uri="{BB962C8B-B14F-4D97-AF65-F5344CB8AC3E}">
-        <p14:creationId xmlns:p14="http://schemas.microsoft.com/office/powerpoint/2010/main" val="2979128256"/>
+        <p14:creationId xmlns:p14="http://schemas.microsoft.com/office/powerpoint/2010/main" val="4222760703"/>
       </p:ext>
     </p:extLst>
   </p:cSld>
@@ -3619,7 +3619,7 @@
           <p:cNvPr id="2" name="テキスト ボックス 1">
             <a:extLst>
               <a:ext uri="{FF2B5EF4-FFF2-40B4-BE49-F238E27FC236}">
-                <a16:creationId xmlns:a16="http://schemas.microsoft.com/office/drawing/2014/main" id="{8CD72EC7-1B1A-A59E-31C0-230737B0C918}"/>
+                <a16:creationId xmlns:a16="http://schemas.microsoft.com/office/drawing/2014/main" id="{724E7D23-6FAB-9A3D-A5F4-25D179D81FF9}"/>
               </a:ext>
             </a:extLst>
           </p:cNvPr>
@@ -3665,7 +3665,7 @@
           <p:cNvPr id="3" name="テキスト ボックス 2">
             <a:extLst>
               <a:ext uri="{FF2B5EF4-FFF2-40B4-BE49-F238E27FC236}">
-                <a16:creationId xmlns:a16="http://schemas.microsoft.com/office/drawing/2014/main" id="{DD7779F8-E901-DC08-AED2-B8BE3D937DE2}"/>
+                <a16:creationId xmlns:a16="http://schemas.microsoft.com/office/drawing/2014/main" id="{E9D62B6D-C042-E5E8-B72E-CA743D800958}"/>
               </a:ext>
             </a:extLst>
           </p:cNvPr>
@@ -3714,7 +3714,7 @@
           <p:cNvPr id="4" name="テキスト ボックス 3">
             <a:extLst>
               <a:ext uri="{FF2B5EF4-FFF2-40B4-BE49-F238E27FC236}">
-                <a16:creationId xmlns:a16="http://schemas.microsoft.com/office/drawing/2014/main" id="{9D8886ED-48A5-FB38-52CC-E05A5F43A12A}"/>
+                <a16:creationId xmlns:a16="http://schemas.microsoft.com/office/drawing/2014/main" id="{ABE89FC4-EB66-DFA5-1A73-30D7ECF302B0}"/>
               </a:ext>
             </a:extLst>
           </p:cNvPr>
@@ -3754,7 +3754,7 @@
           <p:cNvPr id="5" name="テキスト ボックス 4">
             <a:extLst>
               <a:ext uri="{FF2B5EF4-FFF2-40B4-BE49-F238E27FC236}">
-                <a16:creationId xmlns:a16="http://schemas.microsoft.com/office/drawing/2014/main" id="{0A0E7764-5596-5C3D-99F9-9FC14B6AFA65}"/>
+                <a16:creationId xmlns:a16="http://schemas.microsoft.com/office/drawing/2014/main" id="{7CFA8A60-88A4-7171-3555-59F2DD4DD286}"/>
               </a:ext>
             </a:extLst>
           </p:cNvPr>
@@ -3801,7 +3801,7 @@
             <a:hlinkClick r:id="" action="ppaction://media"/>
             <a:extLst>
               <a:ext uri="{FF2B5EF4-FFF2-40B4-BE49-F238E27FC236}">
-                <a16:creationId xmlns:a16="http://schemas.microsoft.com/office/drawing/2014/main" id="{8F04BB91-B8FB-0FB8-2DE8-CD55FFB91108}"/>
+                <a16:creationId xmlns:a16="http://schemas.microsoft.com/office/drawing/2014/main" id="{53B99094-BF53-3099-9989-F229D28AA87C}"/>
               </a:ext>
             </a:extLst>
           </p:cNvPr>
@@ -3836,7 +3836,7 @@
     </p:spTree>
     <p:extLst>
       <p:ext uri="{BB962C8B-B14F-4D97-AF65-F5344CB8AC3E}">
-        <p14:creationId xmlns:p14="http://schemas.microsoft.com/office/powerpoint/2010/main" val="1529787436"/>
+        <p14:creationId xmlns:p14="http://schemas.microsoft.com/office/powerpoint/2010/main" val="793270188"/>
       </p:ext>
     </p:extLst>
   </p:cSld>
@@ -3960,7 +3960,7 @@
           <p:cNvPr id="2" name="テキスト ボックス 1">
             <a:extLst>
               <a:ext uri="{FF2B5EF4-FFF2-40B4-BE49-F238E27FC236}">
-                <a16:creationId xmlns:a16="http://schemas.microsoft.com/office/drawing/2014/main" id="{1380D5D7-6A9F-581C-8742-E332E0E40AF8}"/>
+                <a16:creationId xmlns:a16="http://schemas.microsoft.com/office/drawing/2014/main" id="{D7531AA0-A47B-5B5C-DAF6-2E4D3470A320}"/>
               </a:ext>
             </a:extLst>
           </p:cNvPr>
@@ -4006,7 +4006,7 @@
           <p:cNvPr id="3" name="テキスト ボックス 2">
             <a:extLst>
               <a:ext uri="{FF2B5EF4-FFF2-40B4-BE49-F238E27FC236}">
-                <a16:creationId xmlns:a16="http://schemas.microsoft.com/office/drawing/2014/main" id="{91680090-B296-C871-1F91-CAB750986963}"/>
+                <a16:creationId xmlns:a16="http://schemas.microsoft.com/office/drawing/2014/main" id="{8A1C5A1E-1918-30CF-759A-5A51FA996C44}"/>
               </a:ext>
             </a:extLst>
           </p:cNvPr>
@@ -4046,7 +4046,7 @@
           <p:cNvPr id="4" name="テキスト ボックス 3">
             <a:extLst>
               <a:ext uri="{FF2B5EF4-FFF2-40B4-BE49-F238E27FC236}">
-                <a16:creationId xmlns:a16="http://schemas.microsoft.com/office/drawing/2014/main" id="{C8E453B7-955B-25BE-6331-22016B6AD75C}"/>
+                <a16:creationId xmlns:a16="http://schemas.microsoft.com/office/drawing/2014/main" id="{D5EF2354-92A9-1581-099A-8AE4083E58DE}"/>
               </a:ext>
             </a:extLst>
           </p:cNvPr>
@@ -4076,14 +4076,17 @@
                 </a:solidFill>
                 <a:latin typeface="Arial" panose="020B0604020202020204" pitchFamily="34" charset="0"/>
               </a:rPr>
-              <a:t>About Laravel Laravel is a web application framework with expressive, elegant syntax</a:t>
-            </a:r>
-            <a:endParaRPr kumimoji="1" lang="ja-JP" altLang="en-US" sz="2000">
-              <a:solidFill>
-                <a:srgbClr val="333333"/>
-              </a:solidFill>
-              <a:latin typeface="Arial" panose="020B0604020202020204" pitchFamily="34" charset="0"/>
-            </a:endParaRPr>
+              <a:t>Furusato Hikaku</a:t>
+            </a:r>
+            <a:r>
+              <a:rPr kumimoji="1" lang="ja-JP" altLang="en-US" sz="2000">
+                <a:solidFill>
+                  <a:srgbClr val="333333"/>
+                </a:solidFill>
+                <a:latin typeface="Arial" panose="020B0604020202020204" pitchFamily="34" charset="0"/>
+              </a:rPr>
+              <a:t>の目的、構成、実装を公開コードから確認できるプロジェクトです。</a:t>
+            </a:r>
           </a:p>
         </p:txBody>
       </p:sp>
@@ -4092,7 +4095,7 @@
           <p:cNvPr id="5" name="テキスト ボックス 4">
             <a:extLst>
               <a:ext uri="{FF2B5EF4-FFF2-40B4-BE49-F238E27FC236}">
-                <a16:creationId xmlns:a16="http://schemas.microsoft.com/office/drawing/2014/main" id="{0B56D4A1-44DC-C8C8-F58C-FC54CFEF662A}"/>
+                <a16:creationId xmlns:a16="http://schemas.microsoft.com/office/drawing/2014/main" id="{F54F026B-9A57-4AC2-D60C-2FABE7EA6B9F}"/>
               </a:ext>
             </a:extLst>
           </p:cNvPr>
@@ -4139,7 +4142,7 @@
             <a:hlinkClick r:id="" action="ppaction://media"/>
             <a:extLst>
               <a:ext uri="{FF2B5EF4-FFF2-40B4-BE49-F238E27FC236}">
-                <a16:creationId xmlns:a16="http://schemas.microsoft.com/office/drawing/2014/main" id="{5BCEEF1B-D280-A39E-D12E-95368B72E23D}"/>
+                <a16:creationId xmlns:a16="http://schemas.microsoft.com/office/drawing/2014/main" id="{B5A6AF74-94F1-44E1-F9E2-AD3C113E0EAE}"/>
               </a:ext>
             </a:extLst>
           </p:cNvPr>
@@ -4174,7 +4177,7 @@
     </p:spTree>
     <p:extLst>
       <p:ext uri="{BB962C8B-B14F-4D97-AF65-F5344CB8AC3E}">
-        <p14:creationId xmlns:p14="http://schemas.microsoft.com/office/powerpoint/2010/main" val="3321479364"/>
+        <p14:creationId xmlns:p14="http://schemas.microsoft.com/office/powerpoint/2010/main" val="3820007611"/>
       </p:ext>
     </p:extLst>
   </p:cSld>
@@ -4217,7 +4220,7 @@
                                   <p:childTnLst>
                                     <p:cmd type="call" cmd="playFrom(0.0)">
                                       <p:cBhvr>
-                                        <p:cTn id="6" dur="7780" fill="hold"/>
+                                        <p:cTn id="6" dur="7116" fill="hold"/>
                                         <p:tgtEl>
                                           <p:spTgt spid="6"/>
                                         </p:tgtEl>
@@ -4298,7 +4301,7 @@
           <p:cNvPr id="2" name="テキスト ボックス 1">
             <a:extLst>
               <a:ext uri="{FF2B5EF4-FFF2-40B4-BE49-F238E27FC236}">
-                <a16:creationId xmlns:a16="http://schemas.microsoft.com/office/drawing/2014/main" id="{D19DD322-78DA-A6DD-44D0-188E6B4F7BAE}"/>
+                <a16:creationId xmlns:a16="http://schemas.microsoft.com/office/drawing/2014/main" id="{DF4DD0F6-2673-7BA4-531F-FE7EEC90155D}"/>
               </a:ext>
             </a:extLst>
           </p:cNvPr>
@@ -4344,7 +4347,7 @@
           <p:cNvPr id="3" name="テキスト ボックス 2">
             <a:extLst>
               <a:ext uri="{FF2B5EF4-FFF2-40B4-BE49-F238E27FC236}">
-                <a16:creationId xmlns:a16="http://schemas.microsoft.com/office/drawing/2014/main" id="{5E626A0D-68FF-E452-572F-EF7FA8604738}"/>
+                <a16:creationId xmlns:a16="http://schemas.microsoft.com/office/drawing/2014/main" id="{1739E9F6-7197-D5F3-4E8B-0CBB593C1F20}"/>
               </a:ext>
             </a:extLst>
           </p:cNvPr>
@@ -4384,7 +4387,7 @@
           <p:cNvPr id="4" name="テキスト ボックス 3">
             <a:extLst>
               <a:ext uri="{FF2B5EF4-FFF2-40B4-BE49-F238E27FC236}">
-                <a16:creationId xmlns:a16="http://schemas.microsoft.com/office/drawing/2014/main" id="{051FB06D-524D-4CCB-C41A-B2791E66F701}"/>
+                <a16:creationId xmlns:a16="http://schemas.microsoft.com/office/drawing/2014/main" id="{1566BA8A-159C-20BB-3F0D-31A4F4B580E9}"/>
               </a:ext>
             </a:extLst>
           </p:cNvPr>
@@ -4497,7 +4500,7 @@
           <p:cNvPr id="5" name="テキスト ボックス 4">
             <a:extLst>
               <a:ext uri="{FF2B5EF4-FFF2-40B4-BE49-F238E27FC236}">
-                <a16:creationId xmlns:a16="http://schemas.microsoft.com/office/drawing/2014/main" id="{5934A236-E68F-B831-68D7-C688B7F5F0F4}"/>
+                <a16:creationId xmlns:a16="http://schemas.microsoft.com/office/drawing/2014/main" id="{565F32D6-93F3-6348-46CC-2909BCCDCCB8}"/>
               </a:ext>
             </a:extLst>
           </p:cNvPr>
@@ -4544,7 +4547,7 @@
             <a:hlinkClick r:id="" action="ppaction://media"/>
             <a:extLst>
               <a:ext uri="{FF2B5EF4-FFF2-40B4-BE49-F238E27FC236}">
-                <a16:creationId xmlns:a16="http://schemas.microsoft.com/office/drawing/2014/main" id="{DC7E3908-FA1E-7E0A-4247-3C0AFCC9E84E}"/>
+                <a16:creationId xmlns:a16="http://schemas.microsoft.com/office/drawing/2014/main" id="{D21A2A50-5FC2-E923-092F-6B29B4F6B481}"/>
               </a:ext>
             </a:extLst>
           </p:cNvPr>
@@ -4579,7 +4582,7 @@
     </p:spTree>
     <p:extLst>
       <p:ext uri="{BB962C8B-B14F-4D97-AF65-F5344CB8AC3E}">
-        <p14:creationId xmlns:p14="http://schemas.microsoft.com/office/powerpoint/2010/main" val="3145155653"/>
+        <p14:creationId xmlns:p14="http://schemas.microsoft.com/office/powerpoint/2010/main" val="3580271478"/>
       </p:ext>
     </p:extLst>
   </p:cSld>
@@ -4703,7 +4706,7 @@
           <p:cNvPr id="2" name="テキスト ボックス 1">
             <a:extLst>
               <a:ext uri="{FF2B5EF4-FFF2-40B4-BE49-F238E27FC236}">
-                <a16:creationId xmlns:a16="http://schemas.microsoft.com/office/drawing/2014/main" id="{2C9D73C3-10D0-C8E1-2BEB-C7E598E73224}"/>
+                <a16:creationId xmlns:a16="http://schemas.microsoft.com/office/drawing/2014/main" id="{AF922481-38C1-B99A-82B7-2AD2F66D420B}"/>
               </a:ext>
             </a:extLst>
           </p:cNvPr>
@@ -4749,7 +4752,7 @@
           <p:cNvPr id="3" name="テキスト ボックス 2">
             <a:extLst>
               <a:ext uri="{FF2B5EF4-FFF2-40B4-BE49-F238E27FC236}">
-                <a16:creationId xmlns:a16="http://schemas.microsoft.com/office/drawing/2014/main" id="{A852260C-1ED9-1C19-F9FA-87D1966AB772}"/>
+                <a16:creationId xmlns:a16="http://schemas.microsoft.com/office/drawing/2014/main" id="{E21E2833-8224-BC8E-9A5A-95E99786FF22}"/>
               </a:ext>
             </a:extLst>
           </p:cNvPr>
@@ -4789,7 +4792,7 @@
           <p:cNvPr id="4" name="テキスト ボックス 3">
             <a:extLst>
               <a:ext uri="{FF2B5EF4-FFF2-40B4-BE49-F238E27FC236}">
-                <a16:creationId xmlns:a16="http://schemas.microsoft.com/office/drawing/2014/main" id="{73FFA0F9-ACE2-7738-46A7-1E2F071810CB}"/>
+                <a16:creationId xmlns:a16="http://schemas.microsoft.com/office/drawing/2014/main" id="{1DFC6DAF-B463-BE5C-88BC-52AA206C65AB}"/>
               </a:ext>
             </a:extLst>
           </p:cNvPr>
@@ -4899,7 +4902,7 @@
           <p:cNvPr id="5" name="テキスト ボックス 4">
             <a:extLst>
               <a:ext uri="{FF2B5EF4-FFF2-40B4-BE49-F238E27FC236}">
-                <a16:creationId xmlns:a16="http://schemas.microsoft.com/office/drawing/2014/main" id="{E720FD79-DFC3-C6C3-9130-F20BE06FA035}"/>
+                <a16:creationId xmlns:a16="http://schemas.microsoft.com/office/drawing/2014/main" id="{57A7F7A1-43C8-D513-44E0-F28BDDF4885F}"/>
               </a:ext>
             </a:extLst>
           </p:cNvPr>
@@ -4946,7 +4949,7 @@
             <a:hlinkClick r:id="" action="ppaction://media"/>
             <a:extLst>
               <a:ext uri="{FF2B5EF4-FFF2-40B4-BE49-F238E27FC236}">
-                <a16:creationId xmlns:a16="http://schemas.microsoft.com/office/drawing/2014/main" id="{FA258DE9-DF35-3B4E-7746-46DA3C3BA4A0}"/>
+                <a16:creationId xmlns:a16="http://schemas.microsoft.com/office/drawing/2014/main" id="{7899EDCA-9ECD-240E-580E-3F3C292692E0}"/>
               </a:ext>
             </a:extLst>
           </p:cNvPr>
@@ -4981,7 +4984,7 @@
     </p:spTree>
     <p:extLst>
       <p:ext uri="{BB962C8B-B14F-4D97-AF65-F5344CB8AC3E}">
-        <p14:creationId xmlns:p14="http://schemas.microsoft.com/office/powerpoint/2010/main" val="2631471644"/>
+        <p14:creationId xmlns:p14="http://schemas.microsoft.com/office/powerpoint/2010/main" val="11383200"/>
       </p:ext>
     </p:extLst>
   </p:cSld>
@@ -5105,7 +5108,7 @@
           <p:cNvPr id="2" name="テキスト ボックス 1">
             <a:extLst>
               <a:ext uri="{FF2B5EF4-FFF2-40B4-BE49-F238E27FC236}">
-                <a16:creationId xmlns:a16="http://schemas.microsoft.com/office/drawing/2014/main" id="{14AA9D3B-8FEB-38C5-CD7E-65BEBC8A4376}"/>
+                <a16:creationId xmlns:a16="http://schemas.microsoft.com/office/drawing/2014/main" id="{7ACDC18D-CB61-6D3E-FD72-705DCCBC8013}"/>
               </a:ext>
             </a:extLst>
           </p:cNvPr>
@@ -5151,7 +5154,7 @@
           <p:cNvPr id="3" name="テキスト ボックス 2">
             <a:extLst>
               <a:ext uri="{FF2B5EF4-FFF2-40B4-BE49-F238E27FC236}">
-                <a16:creationId xmlns:a16="http://schemas.microsoft.com/office/drawing/2014/main" id="{1D751402-5CD0-FC0E-3744-080A87CDB9C2}"/>
+                <a16:creationId xmlns:a16="http://schemas.microsoft.com/office/drawing/2014/main" id="{AE874AC3-90E4-BA36-CA4F-6BB8039C9F36}"/>
               </a:ext>
             </a:extLst>
           </p:cNvPr>
@@ -5191,7 +5194,7 @@
           <p:cNvPr id="4" name="テキスト ボックス 3">
             <a:extLst>
               <a:ext uri="{FF2B5EF4-FFF2-40B4-BE49-F238E27FC236}">
-                <a16:creationId xmlns:a16="http://schemas.microsoft.com/office/drawing/2014/main" id="{A97468A2-49A9-930F-C32F-C61EB8E6403F}"/>
+                <a16:creationId xmlns:a16="http://schemas.microsoft.com/office/drawing/2014/main" id="{87ECEA51-E2B3-E5F3-CCB0-7235508CB4EB}"/>
               </a:ext>
             </a:extLst>
           </p:cNvPr>
@@ -5215,56 +5218,14 @@
           <a:lstStyle/>
           <a:p>
             <a:r>
-              <a:rPr kumimoji="1" lang="en-US" altLang="ja-JP" sz="2000">
-                <a:solidFill>
-                  <a:srgbClr val="333333"/>
-                </a:solidFill>
-                <a:latin typeface="Arial" panose="020B0604020202020204" pitchFamily="34" charset="0"/>
-              </a:rPr>
-              <a:t>LINE</a:t>
-            </a:r>
-            <a:r>
               <a:rPr kumimoji="1" lang="ja-JP" altLang="en-US" sz="2000">
                 <a:solidFill>
                   <a:srgbClr val="333333"/>
                 </a:solidFill>
                 <a:latin typeface="Arial" panose="020B0604020202020204" pitchFamily="34" charset="0"/>
               </a:rPr>
-              <a:t>ウォッチ通知を追加</a:t>
-            </a:r>
-            <a:r>
-              <a:rPr kumimoji="1" lang="en-US" altLang="ja-JP" sz="2000">
-                <a:solidFill>
-                  <a:srgbClr val="333333"/>
-                </a:solidFill>
-                <a:latin typeface="Arial" panose="020B0604020202020204" pitchFamily="34" charset="0"/>
-              </a:rPr>
-              <a:t>(</a:t>
-            </a:r>
-            <a:r>
-              <a:rPr kumimoji="1" lang="ja-JP" altLang="en-US" sz="2000">
-                <a:solidFill>
-                  <a:srgbClr val="333333"/>
-                </a:solidFill>
-                <a:latin typeface="Arial" panose="020B0604020202020204" pitchFamily="34" charset="0"/>
-              </a:rPr>
-              <a:t>新着・再登場の返礼品検知</a:t>
-            </a:r>
-            <a:r>
-              <a:rPr kumimoji="1" lang="en-US" altLang="ja-JP" sz="2000">
-                <a:solidFill>
-                  <a:srgbClr val="333333"/>
-                </a:solidFill>
-                <a:latin typeface="Arial" panose="020B0604020202020204" pitchFamily="34" charset="0"/>
-              </a:rPr>
-              <a:t>)</a:t>
-            </a:r>
-            <a:endParaRPr kumimoji="1" lang="ja-JP" altLang="en-US" sz="2000">
-              <a:solidFill>
-                <a:srgbClr val="333333"/>
-              </a:solidFill>
-              <a:latin typeface="Arial" panose="020B0604020202020204" pitchFamily="34" charset="0"/>
-            </a:endParaRPr>
+              <a:t>直近のコミットでは、実装の見直しと継続的な改善が行われました。</a:t>
+            </a:r>
           </a:p>
         </p:txBody>
       </p:sp>
@@ -5273,7 +5234,7 @@
           <p:cNvPr id="5" name="テキスト ボックス 4">
             <a:extLst>
               <a:ext uri="{FF2B5EF4-FFF2-40B4-BE49-F238E27FC236}">
-                <a16:creationId xmlns:a16="http://schemas.microsoft.com/office/drawing/2014/main" id="{340F2910-61D0-4798-B1D6-56634FAC9A85}"/>
+                <a16:creationId xmlns:a16="http://schemas.microsoft.com/office/drawing/2014/main" id="{3C83A7BF-FDBC-BC86-46EB-E648B1EE38D0}"/>
               </a:ext>
             </a:extLst>
           </p:cNvPr>
@@ -5320,7 +5281,7 @@
             <a:hlinkClick r:id="" action="ppaction://media"/>
             <a:extLst>
               <a:ext uri="{FF2B5EF4-FFF2-40B4-BE49-F238E27FC236}">
-                <a16:creationId xmlns:a16="http://schemas.microsoft.com/office/drawing/2014/main" id="{0ED602E9-D008-D2C3-9CC3-128A8C5B6A6F}"/>
+                <a16:creationId xmlns:a16="http://schemas.microsoft.com/office/drawing/2014/main" id="{71D5E3D5-8192-28B3-ED2D-A0DD97800B06}"/>
               </a:ext>
             </a:extLst>
           </p:cNvPr>
@@ -5355,7 +5316,7 @@
     </p:spTree>
     <p:extLst>
       <p:ext uri="{BB962C8B-B14F-4D97-AF65-F5344CB8AC3E}">
-        <p14:creationId xmlns:p14="http://schemas.microsoft.com/office/powerpoint/2010/main" val="1627406340"/>
+        <p14:creationId xmlns:p14="http://schemas.microsoft.com/office/powerpoint/2010/main" val="129695317"/>
       </p:ext>
     </p:extLst>
   </p:cSld>
@@ -5364,10 +5325,10 @@
   </p:clrMapOvr>
   <mc:AlternateContent xmlns:mc="http://schemas.openxmlformats.org/markup-compatibility/2006">
     <mc:Choice xmlns:p14="http://schemas.microsoft.com/office/powerpoint/2010/main" Requires="p14">
-      <p:transition spd="slow" p14:dur="2000" advTm="10000"/>
+      <p:transition spd="slow" p14:dur="2000" advTm="7000"/>
     </mc:Choice>
     <mc:Fallback>
-      <p:transition spd="slow" advTm="10000"/>
+      <p:transition spd="slow" advTm="7000"/>
     </mc:Fallback>
   </mc:AlternateContent>
   <p:timing>
@@ -5398,7 +5359,7 @@
                                   <p:childTnLst>
                                     <p:cmd type="call" cmd="playFrom(0.0)">
                                       <p:cBhvr>
-                                        <p:cTn id="6" dur="9836" fill="hold"/>
+                                        <p:cTn id="6" dur="6076" fill="hold"/>
                                         <p:tgtEl>
                                           <p:spTgt spid="6"/>
                                         </p:tgtEl>
@@ -5479,7 +5440,7 @@
           <p:cNvPr id="2" name="テキスト ボックス 1">
             <a:extLst>
               <a:ext uri="{FF2B5EF4-FFF2-40B4-BE49-F238E27FC236}">
-                <a16:creationId xmlns:a16="http://schemas.microsoft.com/office/drawing/2014/main" id="{B737572F-59B4-9F3F-6366-2680034DCBE8}"/>
+                <a16:creationId xmlns:a16="http://schemas.microsoft.com/office/drawing/2014/main" id="{49DAC29D-F7BD-C5B8-5121-945C04E7B2DA}"/>
               </a:ext>
             </a:extLst>
           </p:cNvPr>
@@ -5525,7 +5486,7 @@
           <p:cNvPr id="3" name="テキスト ボックス 2">
             <a:extLst>
               <a:ext uri="{FF2B5EF4-FFF2-40B4-BE49-F238E27FC236}">
-                <a16:creationId xmlns:a16="http://schemas.microsoft.com/office/drawing/2014/main" id="{72FA9347-E047-8E2E-9919-3AD29D6055FC}"/>
+                <a16:creationId xmlns:a16="http://schemas.microsoft.com/office/drawing/2014/main" id="{980190AF-073D-3514-BA01-391064B6E30C}"/>
               </a:ext>
             </a:extLst>
           </p:cNvPr>
@@ -5565,7 +5526,7 @@
           <p:cNvPr id="4" name="テキスト ボックス 3">
             <a:extLst>
               <a:ext uri="{FF2B5EF4-FFF2-40B4-BE49-F238E27FC236}">
-                <a16:creationId xmlns:a16="http://schemas.microsoft.com/office/drawing/2014/main" id="{9827C9E1-922C-79C5-E149-8B5412CDD92C}"/>
+                <a16:creationId xmlns:a16="http://schemas.microsoft.com/office/drawing/2014/main" id="{9786002A-7A52-E9B1-9AD0-4A215EFDE8F6}"/>
               </a:ext>
             </a:extLst>
           </p:cNvPr>
@@ -5630,7 +5591,7 @@
           <p:cNvPr id="5" name="テキスト ボックス 4">
             <a:extLst>
               <a:ext uri="{FF2B5EF4-FFF2-40B4-BE49-F238E27FC236}">
-                <a16:creationId xmlns:a16="http://schemas.microsoft.com/office/drawing/2014/main" id="{88F3F2A2-915C-834B-FD47-156DEA8C7984}"/>
+                <a16:creationId xmlns:a16="http://schemas.microsoft.com/office/drawing/2014/main" id="{39617599-3262-70CE-84F7-C2EC6A829118}"/>
               </a:ext>
             </a:extLst>
           </p:cNvPr>
@@ -5677,7 +5638,7 @@
             <a:hlinkClick r:id="" action="ppaction://media"/>
             <a:extLst>
               <a:ext uri="{FF2B5EF4-FFF2-40B4-BE49-F238E27FC236}">
-                <a16:creationId xmlns:a16="http://schemas.microsoft.com/office/drawing/2014/main" id="{A78A9235-E45C-38CE-A04D-CED6AEF5275A}"/>
+                <a16:creationId xmlns:a16="http://schemas.microsoft.com/office/drawing/2014/main" id="{499975B0-F68C-612A-FEC0-97A3F74397A2}"/>
               </a:ext>
             </a:extLst>
           </p:cNvPr>
@@ -5712,7 +5673,7 @@
     </p:spTree>
     <p:extLst>
       <p:ext uri="{BB962C8B-B14F-4D97-AF65-F5344CB8AC3E}">
-        <p14:creationId xmlns:p14="http://schemas.microsoft.com/office/powerpoint/2010/main" val="3246805882"/>
+        <p14:creationId xmlns:p14="http://schemas.microsoft.com/office/powerpoint/2010/main" val="2343991824"/>
       </p:ext>
     </p:extLst>
   </p:cSld>
